--- a/img/abstract.pptx
+++ b/img/abstract.pptx
@@ -5,10 +5,11 @@
     <p:sldMasterId id="2147483660" r:id="rId1"/>
   </p:sldMasterIdLst>
   <p:notesMasterIdLst>
-    <p:notesMasterId r:id="rId3"/>
+    <p:notesMasterId r:id="rId4"/>
   </p:notesMasterIdLst>
   <p:sldIdLst>
     <p:sldId id="2076137745" r:id="rId2"/>
+    <p:sldId id="2076137746" r:id="rId3"/>
   </p:sldIdLst>
   <p:sldSz cx="12192000" cy="6858000"/>
   <p:notesSz cx="6858000" cy="9144000"/>
@@ -197,7 +198,7 @@
           <a:p>
             <a:fld id="{968BE00E-E462-4C44-BFFD-23653394C404}" type="datetimeFigureOut">
               <a:rPr kumimoji="1" lang="ja-JP" altLang="en-US" smtClean="0"/>
-              <a:t>2026/7/14</a:t>
+              <a:t>2026/7/21</a:t>
             </a:fld>
             <a:endParaRPr kumimoji="1" lang="ja-JP" altLang="en-US"/>
           </a:p>
@@ -1655,6 +1656,115 @@
           <a:chExt cx="0" cy="0"/>
         </a:xfrm>
       </p:grpSpPr>
+      <p:pic>
+        <p:nvPicPr>
+          <p:cNvPr id="11" name="図 10" descr="屋内, 天井, 人, テーブル が含まれている画像&#10;&#10;AI 生成コンテンツは誤りを含む可能性があります。">
+            <a:extLst>
+              <a:ext uri="{FF2B5EF4-FFF2-40B4-BE49-F238E27FC236}">
+                <a16:creationId xmlns:a16="http://schemas.microsoft.com/office/drawing/2014/main" id="{81315700-C548-C609-65AE-3EBB5B77D521}"/>
+              </a:ext>
+            </a:extLst>
+          </p:cNvPr>
+          <p:cNvPicPr>
+            <a:picLocks noChangeAspect="1"/>
+          </p:cNvPicPr>
+          <p:nvPr/>
+        </p:nvPicPr>
+        <p:blipFill>
+          <a:blip r:embed="rId2" cstate="print">
+            <a:alphaModFix amt="70000"/>
+            <a:extLst>
+              <a:ext uri="{BEBA8EAE-BF5A-486C-A8C5-ECC9F3942E4B}">
+                <a14:imgProps xmlns:a14="http://schemas.microsoft.com/office/drawing/2010/main">
+                  <a14:imgLayer r:embed="rId3">
+                    <a14:imgEffect>
+                      <a14:brightnessContrast bright="-40000"/>
+                    </a14:imgEffect>
+                  </a14:imgLayer>
+                </a14:imgProps>
+              </a:ext>
+              <a:ext uri="{28A0092B-C50C-407E-A947-70E740481C1C}">
+                <a14:useLocalDpi xmlns:a14="http://schemas.microsoft.com/office/drawing/2010/main" val="0"/>
+              </a:ext>
+            </a:extLst>
+          </a:blip>
+          <a:srcRect r="5090" b="11117"/>
+          <a:stretch>
+            <a:fillRect/>
+          </a:stretch>
+        </p:blipFill>
+        <p:spPr>
+          <a:xfrm>
+            <a:off x="2554565" y="1155451"/>
+            <a:ext cx="6890496" cy="4041582"/>
+          </a:xfrm>
+          <a:prstGeom prst="rect">
+            <a:avLst/>
+          </a:prstGeom>
+          <a:ln w="76200">
+            <a:solidFill>
+              <a:schemeClr val="tx1"/>
+            </a:solidFill>
+          </a:ln>
+        </p:spPr>
+      </p:pic>
+      <p:sp>
+        <p:nvSpPr>
+          <p:cNvPr id="3" name="上矢印 2">
+            <a:extLst>
+              <a:ext uri="{FF2B5EF4-FFF2-40B4-BE49-F238E27FC236}">
+                <a16:creationId xmlns:a16="http://schemas.microsoft.com/office/drawing/2014/main" id="{827F7C25-A603-0117-0031-DE94B01E00B3}"/>
+              </a:ext>
+            </a:extLst>
+          </p:cNvPr>
+          <p:cNvSpPr/>
+          <p:nvPr/>
+        </p:nvSpPr>
+        <p:spPr bwMode="auto">
+          <a:xfrm flipH="1">
+            <a:off x="5794376" y="1972271"/>
+            <a:ext cx="412891" cy="911739"/>
+          </a:xfrm>
+          <a:prstGeom prst="upArrow">
+            <a:avLst/>
+          </a:prstGeom>
+          <a:solidFill>
+            <a:schemeClr val="tx1"/>
+          </a:solidFill>
+          <a:ln>
+            <a:solidFill>
+              <a:schemeClr val="bg1"/>
+            </a:solidFill>
+          </a:ln>
+          <a:effectLst/>
+        </p:spPr>
+        <p:txBody>
+          <a:bodyPr wrap="square" lIns="0" tIns="0" rIns="0" bIns="0" rtlCol="0" anchor="ctr">
+            <a:noAutofit/>
+          </a:bodyPr>
+          <a:lstStyle/>
+          <a:p>
+            <a:pPr marL="361950" indent="-361950" algn="ctr">
+              <a:lnSpc>
+                <a:spcPct val="120000"/>
+              </a:lnSpc>
+              <a:spcBef>
+                <a:spcPts val="1200"/>
+              </a:spcBef>
+              <a:spcAft>
+                <a:spcPts val="600"/>
+              </a:spcAft>
+              <a:buFont typeface="Wingdings" pitchFamily="2" charset="2"/>
+              <a:buChar char="l"/>
+            </a:pPr>
+            <a:endParaRPr kumimoji="1" lang="ja-JP" altLang="en-US" sz="2000" dirty="0">
+              <a:latin typeface="メイリオ" pitchFamily="50" charset="-128"/>
+              <a:ea typeface="メイリオ" pitchFamily="50" charset="-128"/>
+              <a:cs typeface="メイリオ" pitchFamily="50" charset="-128"/>
+            </a:endParaRPr>
+          </a:p>
+        </p:txBody>
+      </p:sp>
       <p:sp>
         <p:nvSpPr>
           <p:cNvPr id="2" name="スライド番号プレースホルダー 1">
@@ -1742,12 +1852,857 @@
           </a:p>
         </p:txBody>
       </p:sp>
+      <p:sp>
+        <p:nvSpPr>
+          <p:cNvPr id="24" name="角丸四角形 23">
+            <a:extLst>
+              <a:ext uri="{FF2B5EF4-FFF2-40B4-BE49-F238E27FC236}">
+                <a16:creationId xmlns:a16="http://schemas.microsoft.com/office/drawing/2014/main" id="{84254626-AF90-0BA1-2918-6D64BE6C12FB}"/>
+              </a:ext>
+            </a:extLst>
+          </p:cNvPr>
+          <p:cNvSpPr/>
+          <p:nvPr/>
+        </p:nvSpPr>
+        <p:spPr bwMode="auto">
+          <a:xfrm>
+            <a:off x="5407593" y="1484433"/>
+            <a:ext cx="1238673" cy="412892"/>
+          </a:xfrm>
+          <a:prstGeom prst="roundRect">
+            <a:avLst/>
+          </a:prstGeom>
+          <a:solidFill>
+            <a:schemeClr val="tx1"/>
+          </a:solidFill>
+          <a:ln>
+            <a:solidFill>
+              <a:schemeClr val="bg1"/>
+            </a:solidFill>
+          </a:ln>
+          <a:effectLst/>
+        </p:spPr>
+        <p:txBody>
+          <a:bodyPr wrap="square" lIns="0" tIns="0" rIns="0" bIns="0" rtlCol="0" anchor="ctr">
+            <a:noAutofit/>
+          </a:bodyPr>
+          <a:lstStyle/>
+          <a:p>
+            <a:pPr algn="ctr">
+              <a:lnSpc>
+                <a:spcPct val="120000"/>
+              </a:lnSpc>
+              <a:spcBef>
+                <a:spcPts val="1200"/>
+              </a:spcBef>
+              <a:spcAft>
+                <a:spcPts val="600"/>
+              </a:spcAft>
+            </a:pPr>
+            <a:r>
+              <a:rPr lang="en-US" altLang="ja-JP" b="1" dirty="0">
+                <a:solidFill>
+                  <a:srgbClr val="92D050"/>
+                </a:solidFill>
+                <a:latin typeface="Segoe UI" panose="020B0502040204020203" pitchFamily="34" charset="0"/>
+                <a:ea typeface="BIZ UDGothic" panose="020B0400000000000000" pitchFamily="49" charset="-128"/>
+                <a:cs typeface="Segoe UI" panose="020B0502040204020203" pitchFamily="34" charset="0"/>
+              </a:rPr>
+              <a:t>Human</a:t>
+            </a:r>
+            <a:endParaRPr kumimoji="1" lang="ja-JP" altLang="en-US" b="1" dirty="0">
+              <a:solidFill>
+                <a:srgbClr val="92D050"/>
+              </a:solidFill>
+              <a:latin typeface="Segoe UI" panose="020B0502040204020203" pitchFamily="34" charset="0"/>
+              <a:ea typeface="BIZ UDGothic" panose="020B0400000000000000" pitchFamily="49" charset="-128"/>
+              <a:cs typeface="Segoe UI" panose="020B0502040204020203" pitchFamily="34" charset="0"/>
+            </a:endParaRPr>
+          </a:p>
+        </p:txBody>
+      </p:sp>
+      <p:sp>
+        <p:nvSpPr>
+          <p:cNvPr id="25" name="角丸四角形 24">
+            <a:extLst>
+              <a:ext uri="{FF2B5EF4-FFF2-40B4-BE49-F238E27FC236}">
+                <a16:creationId xmlns:a16="http://schemas.microsoft.com/office/drawing/2014/main" id="{84DE181D-61A4-BA18-3E51-DF05B9708B0B}"/>
+              </a:ext>
+            </a:extLst>
+          </p:cNvPr>
+          <p:cNvSpPr/>
+          <p:nvPr/>
+        </p:nvSpPr>
+        <p:spPr bwMode="auto">
+          <a:xfrm>
+            <a:off x="3117271" y="2889404"/>
+            <a:ext cx="1238673" cy="412892"/>
+          </a:xfrm>
+          <a:prstGeom prst="roundRect">
+            <a:avLst/>
+          </a:prstGeom>
+          <a:solidFill>
+            <a:schemeClr val="tx1"/>
+          </a:solidFill>
+          <a:ln>
+            <a:solidFill>
+              <a:schemeClr val="bg1"/>
+            </a:solidFill>
+          </a:ln>
+          <a:effectLst/>
+        </p:spPr>
+        <p:txBody>
+          <a:bodyPr wrap="square" lIns="0" tIns="0" rIns="0" bIns="0" rtlCol="0" anchor="ctr">
+            <a:noAutofit/>
+          </a:bodyPr>
+          <a:lstStyle/>
+          <a:p>
+            <a:pPr algn="ctr">
+              <a:lnSpc>
+                <a:spcPct val="120000"/>
+              </a:lnSpc>
+              <a:spcBef>
+                <a:spcPts val="1200"/>
+              </a:spcBef>
+              <a:spcAft>
+                <a:spcPts val="600"/>
+              </a:spcAft>
+            </a:pPr>
+            <a:r>
+              <a:rPr lang="en-US" altLang="ja-JP" b="1" dirty="0">
+                <a:solidFill>
+                  <a:srgbClr val="92D050"/>
+                </a:solidFill>
+                <a:latin typeface="Segoe UI" panose="020B0502040204020203" pitchFamily="34" charset="0"/>
+                <a:ea typeface="BIZ UDGothic" panose="020B0400000000000000" pitchFamily="49" charset="-128"/>
+                <a:cs typeface="Segoe UI" panose="020B0502040204020203" pitchFamily="34" charset="0"/>
+              </a:rPr>
+              <a:t>Plant</a:t>
+            </a:r>
+            <a:endParaRPr kumimoji="1" lang="ja-JP" altLang="en-US" b="1" dirty="0">
+              <a:solidFill>
+                <a:srgbClr val="92D050"/>
+              </a:solidFill>
+              <a:latin typeface="Segoe UI" panose="020B0502040204020203" pitchFamily="34" charset="0"/>
+              <a:ea typeface="BIZ UDGothic" panose="020B0400000000000000" pitchFamily="49" charset="-128"/>
+              <a:cs typeface="Segoe UI" panose="020B0502040204020203" pitchFamily="34" charset="0"/>
+            </a:endParaRPr>
+          </a:p>
+        </p:txBody>
+      </p:sp>
+      <p:sp>
+        <p:nvSpPr>
+          <p:cNvPr id="26" name="角丸四角形 25">
+            <a:extLst>
+              <a:ext uri="{FF2B5EF4-FFF2-40B4-BE49-F238E27FC236}">
+                <a16:creationId xmlns:a16="http://schemas.microsoft.com/office/drawing/2014/main" id="{D4031899-5B4F-BC15-E7AE-A3BA22020A03}"/>
+              </a:ext>
+            </a:extLst>
+          </p:cNvPr>
+          <p:cNvSpPr/>
+          <p:nvPr/>
+        </p:nvSpPr>
+        <p:spPr bwMode="auto">
+          <a:xfrm>
+            <a:off x="7652394" y="2884009"/>
+            <a:ext cx="1238673" cy="412892"/>
+          </a:xfrm>
+          <a:prstGeom prst="roundRect">
+            <a:avLst/>
+          </a:prstGeom>
+          <a:solidFill>
+            <a:schemeClr val="tx1"/>
+          </a:solidFill>
+          <a:ln>
+            <a:solidFill>
+              <a:schemeClr val="bg1"/>
+            </a:solidFill>
+          </a:ln>
+          <a:effectLst/>
+        </p:spPr>
+        <p:txBody>
+          <a:bodyPr wrap="square" lIns="0" tIns="0" rIns="0" bIns="0" rtlCol="0" anchor="ctr">
+            <a:noAutofit/>
+          </a:bodyPr>
+          <a:lstStyle/>
+          <a:p>
+            <a:pPr algn="ctr">
+              <a:lnSpc>
+                <a:spcPct val="120000"/>
+              </a:lnSpc>
+              <a:spcBef>
+                <a:spcPts val="1200"/>
+              </a:spcBef>
+              <a:spcAft>
+                <a:spcPts val="600"/>
+              </a:spcAft>
+            </a:pPr>
+            <a:r>
+              <a:rPr lang="en-US" altLang="ja-JP" b="1" dirty="0">
+                <a:solidFill>
+                  <a:srgbClr val="92D050"/>
+                </a:solidFill>
+                <a:latin typeface="Segoe UI" panose="020B0502040204020203" pitchFamily="34" charset="0"/>
+                <a:ea typeface="BIZ UDGothic" panose="020B0400000000000000" pitchFamily="49" charset="-128"/>
+                <a:cs typeface="Segoe UI" panose="020B0502040204020203" pitchFamily="34" charset="0"/>
+              </a:rPr>
+              <a:t>Robot</a:t>
+            </a:r>
+            <a:endParaRPr kumimoji="1" lang="ja-JP" altLang="en-US" b="1" dirty="0">
+              <a:solidFill>
+                <a:srgbClr val="92D050"/>
+              </a:solidFill>
+              <a:latin typeface="Segoe UI" panose="020B0502040204020203" pitchFamily="34" charset="0"/>
+              <a:ea typeface="BIZ UDGothic" panose="020B0400000000000000" pitchFamily="49" charset="-128"/>
+              <a:cs typeface="Segoe UI" panose="020B0502040204020203" pitchFamily="34" charset="0"/>
+            </a:endParaRPr>
+          </a:p>
+        </p:txBody>
+      </p:sp>
+      <p:sp>
+        <p:nvSpPr>
+          <p:cNvPr id="27" name="テキスト ボックス 26">
+            <a:extLst>
+              <a:ext uri="{FF2B5EF4-FFF2-40B4-BE49-F238E27FC236}">
+                <a16:creationId xmlns:a16="http://schemas.microsoft.com/office/drawing/2014/main" id="{F3BB6227-C121-8CF2-68A5-FF249C97B8B6}"/>
+              </a:ext>
+            </a:extLst>
+          </p:cNvPr>
+          <p:cNvSpPr txBox="1"/>
+          <p:nvPr/>
+        </p:nvSpPr>
+        <p:spPr>
+          <a:xfrm>
+            <a:off x="2743812" y="1880706"/>
+            <a:ext cx="2552684" cy="696435"/>
+          </a:xfrm>
+          <a:prstGeom prst="rect">
+            <a:avLst/>
+          </a:prstGeom>
+          <a:solidFill>
+            <a:srgbClr val="FFFFFF">
+              <a:alpha val="79608"/>
+            </a:srgbClr>
+          </a:solidFill>
+          <a:effectLst>
+            <a:softEdge rad="63500"/>
+          </a:effectLst>
+        </p:spPr>
+        <p:txBody>
+          <a:bodyPr wrap="none" rtlCol="0" anchor="ctr" anchorCtr="0">
+            <a:noAutofit/>
+          </a:bodyPr>
+          <a:lstStyle/>
+          <a:p>
+            <a:pPr algn="ctr">
+              <a:lnSpc>
+                <a:spcPct val="120000"/>
+              </a:lnSpc>
+            </a:pPr>
+            <a:r>
+              <a:rPr lang="en" altLang="ja-JP" sz="1400" dirty="0">
+                <a:solidFill>
+                  <a:schemeClr val="accent6"/>
+                </a:solidFill>
+                <a:latin typeface="Segoe UI" panose="020B0502040204020203" pitchFamily="34" charset="0"/>
+                <a:ea typeface="BIZ UDGothic" panose="020B0400000000000000" pitchFamily="49" charset="-128"/>
+                <a:cs typeface="Segoe UI" panose="020B0502040204020203" pitchFamily="34" charset="0"/>
+              </a:rPr>
+              <a:t>Enhancement of humans’</a:t>
+            </a:r>
+            <a:br>
+              <a:rPr lang="en" altLang="ja-JP" sz="1400" dirty="0">
+                <a:solidFill>
+                  <a:schemeClr val="accent6"/>
+                </a:solidFill>
+                <a:latin typeface="Segoe UI" panose="020B0502040204020203" pitchFamily="34" charset="0"/>
+                <a:ea typeface="BIZ UDGothic" panose="020B0400000000000000" pitchFamily="49" charset="-128"/>
+                <a:cs typeface="Segoe UI" panose="020B0502040204020203" pitchFamily="34" charset="0"/>
+              </a:rPr>
+            </a:br>
+            <a:r>
+              <a:rPr lang="en" altLang="ja-JP" sz="1400" dirty="0">
+                <a:solidFill>
+                  <a:schemeClr val="accent6"/>
+                </a:solidFill>
+                <a:latin typeface="Segoe UI" panose="020B0502040204020203" pitchFamily="34" charset="0"/>
+                <a:ea typeface="BIZ UDGothic" panose="020B0400000000000000" pitchFamily="49" charset="-128"/>
+                <a:cs typeface="Segoe UI" panose="020B0502040204020203" pitchFamily="34" charset="0"/>
+              </a:rPr>
+              <a:t>health &amp; comfort by plants</a:t>
+            </a:r>
+            <a:endParaRPr lang="en-US" altLang="ja-JP" sz="1400" dirty="0">
+              <a:solidFill>
+                <a:schemeClr val="accent6"/>
+              </a:solidFill>
+              <a:latin typeface="Segoe UI" panose="020B0502040204020203" pitchFamily="34" charset="0"/>
+              <a:ea typeface="BIZ UDGothic" panose="020B0400000000000000" pitchFamily="49" charset="-128"/>
+              <a:cs typeface="Segoe UI" panose="020B0502040204020203" pitchFamily="34" charset="0"/>
+            </a:endParaRPr>
+          </a:p>
+        </p:txBody>
+      </p:sp>
+      <p:sp>
+        <p:nvSpPr>
+          <p:cNvPr id="30" name="テキスト ボックス 29">
+            <a:extLst>
+              <a:ext uri="{FF2B5EF4-FFF2-40B4-BE49-F238E27FC236}">
+                <a16:creationId xmlns:a16="http://schemas.microsoft.com/office/drawing/2014/main" id="{FCBD24A4-2608-D39A-6816-7BCCB0A0E8F6}"/>
+              </a:ext>
+            </a:extLst>
+          </p:cNvPr>
+          <p:cNvSpPr txBox="1"/>
+          <p:nvPr/>
+        </p:nvSpPr>
+        <p:spPr>
+          <a:xfrm>
+            <a:off x="6754254" y="1893443"/>
+            <a:ext cx="2552684" cy="690697"/>
+          </a:xfrm>
+          <a:prstGeom prst="rect">
+            <a:avLst/>
+          </a:prstGeom>
+          <a:solidFill>
+            <a:srgbClr val="FFFFFF">
+              <a:alpha val="79608"/>
+            </a:srgbClr>
+          </a:solidFill>
+          <a:effectLst>
+            <a:softEdge rad="63500"/>
+          </a:effectLst>
+        </p:spPr>
+        <p:txBody>
+          <a:bodyPr wrap="none" rtlCol="0" anchor="ctr" anchorCtr="0">
+            <a:noAutofit/>
+          </a:bodyPr>
+          <a:lstStyle/>
+          <a:p>
+            <a:pPr algn="ctr">
+              <a:lnSpc>
+                <a:spcPct val="120000"/>
+              </a:lnSpc>
+            </a:pPr>
+            <a:r>
+              <a:rPr lang="en" altLang="ja-JP" sz="1400" dirty="0">
+                <a:solidFill>
+                  <a:schemeClr val="accent6"/>
+                </a:solidFill>
+                <a:latin typeface="Segoe UI" panose="020B0502040204020203" pitchFamily="34" charset="0"/>
+                <a:ea typeface="BIZ UDGothic" panose="020B0400000000000000" pitchFamily="49" charset="-128"/>
+                <a:cs typeface="Segoe UI" panose="020B0502040204020203" pitchFamily="34" charset="0"/>
+              </a:rPr>
+              <a:t>Prediction of human </a:t>
+            </a:r>
+          </a:p>
+          <a:p>
+            <a:pPr algn="ctr">
+              <a:lnSpc>
+                <a:spcPct val="120000"/>
+              </a:lnSpc>
+            </a:pPr>
+            <a:r>
+              <a:rPr lang="en" altLang="ja-JP" sz="1400" dirty="0">
+                <a:solidFill>
+                  <a:schemeClr val="accent6"/>
+                </a:solidFill>
+                <a:latin typeface="Segoe UI" panose="020B0502040204020203" pitchFamily="34" charset="0"/>
+                <a:ea typeface="BIZ UDGothic" panose="020B0400000000000000" pitchFamily="49" charset="-128"/>
+                <a:cs typeface="Segoe UI" panose="020B0502040204020203" pitchFamily="34" charset="0"/>
+              </a:rPr>
+              <a:t>emotions &amp; comfort</a:t>
+            </a:r>
+            <a:endParaRPr lang="en-US" altLang="ja-JP" sz="1400" dirty="0">
+              <a:solidFill>
+                <a:schemeClr val="accent6"/>
+              </a:solidFill>
+              <a:latin typeface="Segoe UI" panose="020B0502040204020203" pitchFamily="34" charset="0"/>
+              <a:ea typeface="BIZ UDGothic" panose="020B0400000000000000" pitchFamily="49" charset="-128"/>
+              <a:cs typeface="Segoe UI" panose="020B0502040204020203" pitchFamily="34" charset="0"/>
+            </a:endParaRPr>
+          </a:p>
+        </p:txBody>
+      </p:sp>
+      <p:sp>
+        <p:nvSpPr>
+          <p:cNvPr id="31" name="テキスト ボックス 30">
+            <a:extLst>
+              <a:ext uri="{FF2B5EF4-FFF2-40B4-BE49-F238E27FC236}">
+                <a16:creationId xmlns:a16="http://schemas.microsoft.com/office/drawing/2014/main" id="{559651B6-754E-C5EC-257D-CD4A2AB3B613}"/>
+              </a:ext>
+            </a:extLst>
+          </p:cNvPr>
+          <p:cNvSpPr txBox="1"/>
+          <p:nvPr/>
+        </p:nvSpPr>
+        <p:spPr>
+          <a:xfrm>
+            <a:off x="3882410" y="4298551"/>
+            <a:ext cx="4234804" cy="482136"/>
+          </a:xfrm>
+          <a:prstGeom prst="rect">
+            <a:avLst/>
+          </a:prstGeom>
+          <a:solidFill>
+            <a:srgbClr val="FFFFFF">
+              <a:alpha val="79608"/>
+            </a:srgbClr>
+          </a:solidFill>
+          <a:effectLst>
+            <a:softEdge rad="63500"/>
+          </a:effectLst>
+        </p:spPr>
+        <p:txBody>
+          <a:bodyPr wrap="none" rtlCol="0" anchor="ctr" anchorCtr="0">
+            <a:noAutofit/>
+          </a:bodyPr>
+          <a:lstStyle/>
+          <a:p>
+            <a:pPr algn="ctr">
+              <a:lnSpc>
+                <a:spcPct val="120000"/>
+              </a:lnSpc>
+            </a:pPr>
+            <a:r>
+              <a:rPr lang="en" altLang="ja-JP" sz="1400" dirty="0">
+                <a:solidFill>
+                  <a:schemeClr val="accent6"/>
+                </a:solidFill>
+                <a:latin typeface="Segoe UI" panose="020B0502040204020203" pitchFamily="34" charset="0"/>
+                <a:ea typeface="BIZ UDGothic" panose="020B0400000000000000" pitchFamily="49" charset="-128"/>
+                <a:cs typeface="Segoe UI" panose="020B0502040204020203" pitchFamily="34" charset="0"/>
+              </a:rPr>
+              <a:t>Automatic maintenance of biophilic spaces</a:t>
+            </a:r>
+            <a:endParaRPr lang="en-US" altLang="ja-JP" sz="1400" dirty="0">
+              <a:solidFill>
+                <a:schemeClr val="accent6"/>
+              </a:solidFill>
+              <a:latin typeface="Segoe UI" panose="020B0502040204020203" pitchFamily="34" charset="0"/>
+              <a:ea typeface="BIZ UDGothic" panose="020B0400000000000000" pitchFamily="49" charset="-128"/>
+              <a:cs typeface="Segoe UI" panose="020B0502040204020203" pitchFamily="34" charset="0"/>
+            </a:endParaRPr>
+          </a:p>
+        </p:txBody>
+      </p:sp>
+      <p:pic>
+        <p:nvPicPr>
+          <p:cNvPr id="8" name="図 7">
+            <a:extLst>
+              <a:ext uri="{FF2B5EF4-FFF2-40B4-BE49-F238E27FC236}">
+                <a16:creationId xmlns:a16="http://schemas.microsoft.com/office/drawing/2014/main" id="{2D2DC0C1-74DA-649E-3679-FF37DF2E512F}"/>
+              </a:ext>
+            </a:extLst>
+          </p:cNvPr>
+          <p:cNvPicPr>
+            <a:picLocks noChangeAspect="1"/>
+          </p:cNvPicPr>
+          <p:nvPr/>
+        </p:nvPicPr>
+        <p:blipFill>
+          <a:blip r:embed="rId4">
+            <a:extLst>
+              <a:ext uri="{BEBA8EAE-BF5A-486C-A8C5-ECC9F3942E4B}">
+                <a14:imgProps xmlns:a14="http://schemas.microsoft.com/office/drawing/2010/main">
+                  <a14:imgLayer r:embed="rId5">
+                    <a14:imgEffect>
+                      <a14:saturation sat="300000"/>
+                    </a14:imgEffect>
+                  </a14:imgLayer>
+                </a14:imgProps>
+              </a:ext>
+            </a:extLst>
+          </a:blip>
+          <a:stretch>
+            <a:fillRect/>
+          </a:stretch>
+        </p:blipFill>
+        <p:spPr>
+          <a:xfrm>
+            <a:off x="5522587" y="2595901"/>
+            <a:ext cx="959878" cy="1808552"/>
+          </a:xfrm>
+          <a:prstGeom prst="rect">
+            <a:avLst/>
+          </a:prstGeom>
+          <a:effectLst>
+            <a:glow rad="101600">
+              <a:schemeClr val="accent5">
+                <a:satMod val="175000"/>
+                <a:alpha val="40000"/>
+              </a:schemeClr>
+            </a:glow>
+          </a:effectLst>
+        </p:spPr>
+      </p:pic>
+      <p:sp>
+        <p:nvSpPr>
+          <p:cNvPr id="14" name="角丸四角形 13">
+            <a:extLst>
+              <a:ext uri="{FF2B5EF4-FFF2-40B4-BE49-F238E27FC236}">
+                <a16:creationId xmlns:a16="http://schemas.microsoft.com/office/drawing/2014/main" id="{080AE603-F839-BAFF-7FDE-E6F1C9E7AF92}"/>
+              </a:ext>
+            </a:extLst>
+          </p:cNvPr>
+          <p:cNvSpPr/>
+          <p:nvPr/>
+        </p:nvSpPr>
+        <p:spPr bwMode="auto">
+          <a:xfrm>
+            <a:off x="5079893" y="5007532"/>
+            <a:ext cx="1894072" cy="412892"/>
+          </a:xfrm>
+          <a:prstGeom prst="roundRect">
+            <a:avLst/>
+          </a:prstGeom>
+          <a:solidFill>
+            <a:schemeClr val="tx1"/>
+          </a:solidFill>
+          <a:ln>
+            <a:noFill/>
+          </a:ln>
+          <a:effectLst/>
+        </p:spPr>
+        <p:txBody>
+          <a:bodyPr wrap="square" lIns="0" tIns="0" rIns="0" bIns="0" rtlCol="0" anchor="ctr">
+            <a:noAutofit/>
+          </a:bodyPr>
+          <a:lstStyle/>
+          <a:p>
+            <a:pPr algn="ctr">
+              <a:lnSpc>
+                <a:spcPct val="120000"/>
+              </a:lnSpc>
+              <a:spcBef>
+                <a:spcPts val="1200"/>
+              </a:spcBef>
+              <a:spcAft>
+                <a:spcPts val="600"/>
+              </a:spcAft>
+            </a:pPr>
+            <a:r>
+              <a:rPr lang="en-US" altLang="ja-JP" b="1" dirty="0">
+                <a:solidFill>
+                  <a:srgbClr val="92D050"/>
+                </a:solidFill>
+                <a:latin typeface="Segoe UI" panose="020B0502040204020203" pitchFamily="34" charset="0"/>
+                <a:ea typeface="BIZ UDGothic" panose="020B0400000000000000" pitchFamily="49" charset="-128"/>
+                <a:cs typeface="Segoe UI" panose="020B0502040204020203" pitchFamily="34" charset="0"/>
+              </a:rPr>
+              <a:t>Space Design</a:t>
+            </a:r>
+            <a:endParaRPr kumimoji="1" lang="ja-JP" altLang="en-US" b="1" dirty="0">
+              <a:solidFill>
+                <a:srgbClr val="92D050"/>
+              </a:solidFill>
+              <a:latin typeface="Segoe UI" panose="020B0502040204020203" pitchFamily="34" charset="0"/>
+              <a:ea typeface="BIZ UDGothic" panose="020B0400000000000000" pitchFamily="49" charset="-128"/>
+              <a:cs typeface="Segoe UI" panose="020B0502040204020203" pitchFamily="34" charset="0"/>
+            </a:endParaRPr>
+          </a:p>
+        </p:txBody>
+      </p:sp>
+      <p:sp>
+        <p:nvSpPr>
+          <p:cNvPr id="16" name="テキスト ボックス 15">
+            <a:extLst>
+              <a:ext uri="{FF2B5EF4-FFF2-40B4-BE49-F238E27FC236}">
+                <a16:creationId xmlns:a16="http://schemas.microsoft.com/office/drawing/2014/main" id="{DED029FE-4D59-9D9E-D5DE-A57E24D4F932}"/>
+              </a:ext>
+            </a:extLst>
+          </p:cNvPr>
+          <p:cNvSpPr txBox="1"/>
+          <p:nvPr/>
+        </p:nvSpPr>
+        <p:spPr>
+          <a:xfrm>
+            <a:off x="2898726" y="5423878"/>
+            <a:ext cx="6202171" cy="365829"/>
+          </a:xfrm>
+          <a:prstGeom prst="rect">
+            <a:avLst/>
+          </a:prstGeom>
+          <a:solidFill>
+            <a:srgbClr val="FFFFFF">
+              <a:alpha val="79608"/>
+            </a:srgbClr>
+          </a:solidFill>
+        </p:spPr>
+        <p:txBody>
+          <a:bodyPr wrap="none" rtlCol="0" anchor="ctr" anchorCtr="0">
+            <a:noAutofit/>
+          </a:bodyPr>
+          <a:lstStyle/>
+          <a:p>
+            <a:pPr algn="ctr">
+              <a:lnSpc>
+                <a:spcPct val="120000"/>
+              </a:lnSpc>
+            </a:pPr>
+            <a:r>
+              <a:rPr lang="en" altLang="ja-JP" sz="1400" dirty="0">
+                <a:solidFill>
+                  <a:schemeClr val="accent6"/>
+                </a:solidFill>
+                <a:latin typeface="Segoe UI" panose="020B0502040204020203" pitchFamily="34" charset="0"/>
+                <a:ea typeface="BIZ UDGothic" panose="020B0400000000000000" pitchFamily="49" charset="-128"/>
+                <a:cs typeface="Segoe UI" panose="020B0502040204020203" pitchFamily="34" charset="0"/>
+              </a:rPr>
+              <a:t>Spatial designs suitable for plants &amp; robots preserving humans’ comfort</a:t>
+            </a:r>
+            <a:endParaRPr lang="en-US" altLang="ja-JP" sz="1400" dirty="0">
+              <a:solidFill>
+                <a:schemeClr val="accent6"/>
+              </a:solidFill>
+              <a:latin typeface="Segoe UI" panose="020B0502040204020203" pitchFamily="34" charset="0"/>
+              <a:ea typeface="BIZ UDGothic" panose="020B0400000000000000" pitchFamily="49" charset="-128"/>
+              <a:cs typeface="Segoe UI" panose="020B0502040204020203" pitchFamily="34" charset="0"/>
+            </a:endParaRPr>
+          </a:p>
+        </p:txBody>
+      </p:sp>
+      <p:sp>
+        <p:nvSpPr>
+          <p:cNvPr id="4" name="上矢印 3">
+            <a:extLst>
+              <a:ext uri="{FF2B5EF4-FFF2-40B4-BE49-F238E27FC236}">
+                <a16:creationId xmlns:a16="http://schemas.microsoft.com/office/drawing/2014/main" id="{B4B5D82E-7201-BC3B-C6B7-03C1FD3D73D0}"/>
+              </a:ext>
+            </a:extLst>
+          </p:cNvPr>
+          <p:cNvSpPr/>
+          <p:nvPr/>
+        </p:nvSpPr>
+        <p:spPr bwMode="auto">
+          <a:xfrm rot="5400000" flipH="1">
+            <a:off x="4731177" y="2634586"/>
+            <a:ext cx="412891" cy="911739"/>
+          </a:xfrm>
+          <a:prstGeom prst="upArrow">
+            <a:avLst/>
+          </a:prstGeom>
+          <a:solidFill>
+            <a:schemeClr val="tx1"/>
+          </a:solidFill>
+          <a:ln>
+            <a:solidFill>
+              <a:schemeClr val="bg1"/>
+            </a:solidFill>
+          </a:ln>
+          <a:effectLst/>
+        </p:spPr>
+        <p:txBody>
+          <a:bodyPr wrap="square" lIns="0" tIns="0" rIns="0" bIns="0" rtlCol="0" anchor="ctr">
+            <a:noAutofit/>
+          </a:bodyPr>
+          <a:lstStyle/>
+          <a:p>
+            <a:pPr marL="361950" indent="-361950" algn="ctr">
+              <a:lnSpc>
+                <a:spcPct val="120000"/>
+              </a:lnSpc>
+              <a:spcBef>
+                <a:spcPts val="1200"/>
+              </a:spcBef>
+              <a:spcAft>
+                <a:spcPts val="600"/>
+              </a:spcAft>
+              <a:buFont typeface="Wingdings" pitchFamily="2" charset="2"/>
+              <a:buChar char="l"/>
+            </a:pPr>
+            <a:endParaRPr kumimoji="1" lang="ja-JP" altLang="en-US" sz="2000" dirty="0">
+              <a:latin typeface="メイリオ" pitchFamily="50" charset="-128"/>
+              <a:ea typeface="メイリオ" pitchFamily="50" charset="-128"/>
+              <a:cs typeface="メイリオ" pitchFamily="50" charset="-128"/>
+            </a:endParaRPr>
+          </a:p>
+        </p:txBody>
+      </p:sp>
+      <p:sp>
+        <p:nvSpPr>
+          <p:cNvPr id="5" name="上矢印 4">
+            <a:extLst>
+              <a:ext uri="{FF2B5EF4-FFF2-40B4-BE49-F238E27FC236}">
+                <a16:creationId xmlns:a16="http://schemas.microsoft.com/office/drawing/2014/main" id="{75E5FB1F-6247-5863-093E-158A2020AB16}"/>
+              </a:ext>
+            </a:extLst>
+          </p:cNvPr>
+          <p:cNvSpPr/>
+          <p:nvPr/>
+        </p:nvSpPr>
+        <p:spPr bwMode="auto">
+          <a:xfrm rot="16200000" flipH="1">
+            <a:off x="6860984" y="2634586"/>
+            <a:ext cx="412891" cy="911739"/>
+          </a:xfrm>
+          <a:prstGeom prst="upArrow">
+            <a:avLst/>
+          </a:prstGeom>
+          <a:solidFill>
+            <a:schemeClr val="tx1"/>
+          </a:solidFill>
+          <a:ln>
+            <a:solidFill>
+              <a:schemeClr val="bg1"/>
+            </a:solidFill>
+          </a:ln>
+          <a:effectLst/>
+        </p:spPr>
+        <p:txBody>
+          <a:bodyPr wrap="square" lIns="0" tIns="0" rIns="0" bIns="0" rtlCol="0" anchor="ctr">
+            <a:noAutofit/>
+          </a:bodyPr>
+          <a:lstStyle/>
+          <a:p>
+            <a:pPr marL="361950" indent="-361950" algn="ctr">
+              <a:lnSpc>
+                <a:spcPct val="120000"/>
+              </a:lnSpc>
+              <a:spcBef>
+                <a:spcPts val="1200"/>
+              </a:spcBef>
+              <a:spcAft>
+                <a:spcPts val="600"/>
+              </a:spcAft>
+              <a:buFont typeface="Wingdings" pitchFamily="2" charset="2"/>
+              <a:buChar char="l"/>
+            </a:pPr>
+            <a:endParaRPr kumimoji="1" lang="ja-JP" altLang="en-US" sz="2000" dirty="0">
+              <a:latin typeface="メイリオ" pitchFamily="50" charset="-128"/>
+              <a:ea typeface="メイリオ" pitchFamily="50" charset="-128"/>
+              <a:cs typeface="メイリオ" pitchFamily="50" charset="-128"/>
+            </a:endParaRPr>
+          </a:p>
+        </p:txBody>
+      </p:sp>
+    </p:spTree>
+    <p:extLst>
+      <p:ext uri="{BB962C8B-B14F-4D97-AF65-F5344CB8AC3E}">
+        <p14:creationId xmlns:p14="http://schemas.microsoft.com/office/powerpoint/2010/main" val="2269604328"/>
+      </p:ext>
+    </p:extLst>
+  </p:cSld>
+  <p:clrMapOvr>
+    <a:masterClrMapping/>
+  </p:clrMapOvr>
+</p:sld>
+</file>
+
+<file path=ppt/slides/slide2.xml><?xml version="1.0" encoding="utf-8"?>
+<p:sld xmlns:a="http://schemas.openxmlformats.org/drawingml/2006/main" xmlns:r="http://schemas.openxmlformats.org/officeDocument/2006/relationships" xmlns:p="http://schemas.openxmlformats.org/presentationml/2006/main" show="0">
+  <p:cSld>
+    <p:spTree>
+      <p:nvGrpSpPr>
+        <p:cNvPr id="1" name="">
+          <a:extLst>
+            <a:ext uri="{FF2B5EF4-FFF2-40B4-BE49-F238E27FC236}">
+              <a16:creationId xmlns:a16="http://schemas.microsoft.com/office/drawing/2014/main" id="{8AA83306-13B3-18A2-4B44-73AEC843F7E2}"/>
+            </a:ext>
+          </a:extLst>
+        </p:cNvPr>
+        <p:cNvGrpSpPr/>
+        <p:nvPr/>
+      </p:nvGrpSpPr>
+      <p:grpSpPr>
+        <a:xfrm>
+          <a:off x="0" y="0"/>
+          <a:ext cx="0" cy="0"/>
+          <a:chOff x="0" y="0"/>
+          <a:chExt cx="0" cy="0"/>
+        </a:xfrm>
+      </p:grpSpPr>
+      <p:sp>
+        <p:nvSpPr>
+          <p:cNvPr id="2" name="スライド番号プレースホルダー 1">
+            <a:extLst>
+              <a:ext uri="{FF2B5EF4-FFF2-40B4-BE49-F238E27FC236}">
+                <a16:creationId xmlns:a16="http://schemas.microsoft.com/office/drawing/2014/main" id="{389A0939-65BA-C5A3-94D4-7639C26DEF94}"/>
+              </a:ext>
+            </a:extLst>
+          </p:cNvPr>
+          <p:cNvSpPr>
+            <a:spLocks noGrp="1"/>
+          </p:cNvSpPr>
+          <p:nvPr>
+            <p:ph type="sldNum" sz="quarter" idx="4"/>
+          </p:nvPr>
+        </p:nvSpPr>
+        <p:spPr/>
+        <p:txBody>
+          <a:bodyPr/>
+          <a:lstStyle/>
+          <a:p>
+            <a:pPr marL="0" marR="0" lvl="0" indent="0" algn="ctr" defTabSz="914400" rtl="0" eaLnBrk="1" fontAlgn="auto" latinLnBrk="0" hangingPunct="1">
+              <a:lnSpc>
+                <a:spcPct val="100000"/>
+              </a:lnSpc>
+              <a:spcBef>
+                <a:spcPts val="0"/>
+              </a:spcBef>
+              <a:spcAft>
+                <a:spcPts val="0"/>
+              </a:spcAft>
+              <a:buClrTx/>
+              <a:buSzTx/>
+              <a:buFontTx/>
+              <a:buNone/>
+              <a:tabLst/>
+              <a:defRPr/>
+            </a:pPr>
+            <a:fld id="{FB3508C7-2FE0-4945-9CBD-863E05F850D2}" type="slidenum">
+              <a:rPr kumimoji="1" lang="ja-JP" altLang="en-US" sz="1800" b="1" i="0" u="none" strike="noStrike" kern="1200" cap="none" spc="0" normalizeH="0" baseline="0" noProof="0" smtClean="0">
+                <a:ln>
+                  <a:noFill/>
+                </a:ln>
+                <a:solidFill>
+                  <a:srgbClr val="000000"/>
+                </a:solidFill>
+                <a:effectLst/>
+                <a:uLnTx/>
+                <a:uFillTx/>
+                <a:latin typeface="メイリオ" pitchFamily="50" charset="-128"/>
+                <a:ea typeface="メイリオ" pitchFamily="50" charset="-128"/>
+              </a:rPr>
+              <a:pPr marL="0" marR="0" lvl="0" indent="0" algn="ctr" defTabSz="914400" rtl="0" eaLnBrk="1" fontAlgn="auto" latinLnBrk="0" hangingPunct="1">
+                <a:lnSpc>
+                  <a:spcPct val="100000"/>
+                </a:lnSpc>
+                <a:spcBef>
+                  <a:spcPts val="0"/>
+                </a:spcBef>
+                <a:spcAft>
+                  <a:spcPts val="0"/>
+                </a:spcAft>
+                <a:buClrTx/>
+                <a:buSzTx/>
+                <a:buFontTx/>
+                <a:buNone/>
+                <a:tabLst/>
+                <a:defRPr/>
+              </a:pPr>
+              <a:t>2</a:t>
+            </a:fld>
+            <a:endParaRPr kumimoji="1" lang="ja-JP" altLang="en-US" sz="1800" b="1" i="0" u="none" strike="noStrike" kern="1200" cap="none" spc="0" normalizeH="0" baseline="0" noProof="0" dirty="0">
+              <a:ln>
+                <a:noFill/>
+              </a:ln>
+              <a:solidFill>
+                <a:srgbClr val="000000"/>
+              </a:solidFill>
+              <a:effectLst/>
+              <a:uLnTx/>
+              <a:uFillTx/>
+              <a:latin typeface="メイリオ" pitchFamily="50" charset="-128"/>
+              <a:ea typeface="メイリオ" pitchFamily="50" charset="-128"/>
+            </a:endParaRPr>
+          </a:p>
+        </p:txBody>
+      </p:sp>
       <p:pic>
         <p:nvPicPr>
           <p:cNvPr id="11" name="図 10" descr="屋内, 天井, 人, テーブル が含まれている画像&#10;&#10;AI 生成コンテンツは誤りを含む可能性があります。">
             <a:extLst>
               <a:ext uri="{FF2B5EF4-FFF2-40B4-BE49-F238E27FC236}">
-                <a16:creationId xmlns:a16="http://schemas.microsoft.com/office/drawing/2014/main" id="{81315700-C548-C609-65AE-3EBB5B77D521}"/>
+                <a16:creationId xmlns:a16="http://schemas.microsoft.com/office/drawing/2014/main" id="{9E116EE7-E7C4-91E8-908E-67CFF1E23F7C}"/>
               </a:ext>
             </a:extLst>
           </p:cNvPr>
@@ -1794,7 +2749,7 @@
           <p:cNvPr id="24" name="角丸四角形 23">
             <a:extLst>
               <a:ext uri="{FF2B5EF4-FFF2-40B4-BE49-F238E27FC236}">
-                <a16:creationId xmlns:a16="http://schemas.microsoft.com/office/drawing/2014/main" id="{84254626-AF90-0BA1-2918-6D64BE6C12FB}"/>
+                <a16:creationId xmlns:a16="http://schemas.microsoft.com/office/drawing/2014/main" id="{4445D618-BF9A-6D86-8644-7EF285045129}"/>
               </a:ext>
             </a:extLst>
           </p:cNvPr>
@@ -1863,7 +2818,7 @@
           <p:cNvPr id="25" name="角丸四角形 24">
             <a:extLst>
               <a:ext uri="{FF2B5EF4-FFF2-40B4-BE49-F238E27FC236}">
-                <a16:creationId xmlns:a16="http://schemas.microsoft.com/office/drawing/2014/main" id="{84DE181D-61A4-BA18-3E51-DF05B9708B0B}"/>
+                <a16:creationId xmlns:a16="http://schemas.microsoft.com/office/drawing/2014/main" id="{0FDBAF46-A1E9-2F72-2C31-FB3CB590AB34}"/>
               </a:ext>
             </a:extLst>
           </p:cNvPr>
@@ -1932,7 +2887,7 @@
           <p:cNvPr id="26" name="角丸四角形 25">
             <a:extLst>
               <a:ext uri="{FF2B5EF4-FFF2-40B4-BE49-F238E27FC236}">
-                <a16:creationId xmlns:a16="http://schemas.microsoft.com/office/drawing/2014/main" id="{D4031899-5B4F-BC15-E7AE-A3BA22020A03}"/>
+                <a16:creationId xmlns:a16="http://schemas.microsoft.com/office/drawing/2014/main" id="{7B8736DC-2FE6-01C0-5D87-E4BA8D840613}"/>
               </a:ext>
             </a:extLst>
           </p:cNvPr>
@@ -2001,7 +2956,7 @@
           <p:cNvPr id="27" name="テキスト ボックス 26">
             <a:extLst>
               <a:ext uri="{FF2B5EF4-FFF2-40B4-BE49-F238E27FC236}">
-                <a16:creationId xmlns:a16="http://schemas.microsoft.com/office/drawing/2014/main" id="{F3BB6227-C121-8CF2-68A5-FF249C97B8B6}"/>
+                <a16:creationId xmlns:a16="http://schemas.microsoft.com/office/drawing/2014/main" id="{E031524D-3EC7-697F-DFE6-2F896F045056}"/>
               </a:ext>
             </a:extLst>
           </p:cNvPr>
@@ -2081,7 +3036,7 @@
           <p:cNvPr id="29" name="上矢印 28">
             <a:extLst>
               <a:ext uri="{FF2B5EF4-FFF2-40B4-BE49-F238E27FC236}">
-                <a16:creationId xmlns:a16="http://schemas.microsoft.com/office/drawing/2014/main" id="{2FE8002E-5F3B-1FFE-B6AC-857922196F00}"/>
+                <a16:creationId xmlns:a16="http://schemas.microsoft.com/office/drawing/2014/main" id="{0599F599-BE1D-1D39-F057-5A92CBC26429}"/>
               </a:ext>
             </a:extLst>
           </p:cNvPr>
@@ -2138,7 +3093,7 @@
           <p:cNvPr id="30" name="テキスト ボックス 29">
             <a:extLst>
               <a:ext uri="{FF2B5EF4-FFF2-40B4-BE49-F238E27FC236}">
-                <a16:creationId xmlns:a16="http://schemas.microsoft.com/office/drawing/2014/main" id="{FCBD24A4-2608-D39A-6816-7BCCB0A0E8F6}"/>
+                <a16:creationId xmlns:a16="http://schemas.microsoft.com/office/drawing/2014/main" id="{DE56BBF3-D3F8-96A4-D43C-177E6C9F1D7D}"/>
               </a:ext>
             </a:extLst>
           </p:cNvPr>
@@ -2215,7 +3170,7 @@
           <p:cNvPr id="31" name="テキスト ボックス 30">
             <a:extLst>
               <a:ext uri="{FF2B5EF4-FFF2-40B4-BE49-F238E27FC236}">
-                <a16:creationId xmlns:a16="http://schemas.microsoft.com/office/drawing/2014/main" id="{559651B6-754E-C5EC-257D-CD4A2AB3B613}"/>
+                <a16:creationId xmlns:a16="http://schemas.microsoft.com/office/drawing/2014/main" id="{F49AEA34-B73A-D85C-8E4B-20D99C3AE67C}"/>
               </a:ext>
             </a:extLst>
           </p:cNvPr>
@@ -2292,7 +3247,7 @@
           <p:cNvPr id="32" name="上矢印 31">
             <a:extLst>
               <a:ext uri="{FF2B5EF4-FFF2-40B4-BE49-F238E27FC236}">
-                <a16:creationId xmlns:a16="http://schemas.microsoft.com/office/drawing/2014/main" id="{5319A2DA-3A45-7F9A-370F-BD13C2767302}"/>
+                <a16:creationId xmlns:a16="http://schemas.microsoft.com/office/drawing/2014/main" id="{3EB6BB44-2B55-479B-AED9-0C316ECE0D3F}"/>
               </a:ext>
             </a:extLst>
           </p:cNvPr>
@@ -2349,7 +3304,7 @@
           <p:cNvPr id="8" name="図 7">
             <a:extLst>
               <a:ext uri="{FF2B5EF4-FFF2-40B4-BE49-F238E27FC236}">
-                <a16:creationId xmlns:a16="http://schemas.microsoft.com/office/drawing/2014/main" id="{2D2DC0C1-74DA-649E-3679-FF37DF2E512F}"/>
+                <a16:creationId xmlns:a16="http://schemas.microsoft.com/office/drawing/2014/main" id="{45B5130B-F6A4-ABA4-E485-2DEB8279D63A}"/>
               </a:ext>
             </a:extLst>
           </p:cNvPr>
@@ -2399,7 +3354,7 @@
           <p:cNvPr id="6" name="上矢印 5">
             <a:extLst>
               <a:ext uri="{FF2B5EF4-FFF2-40B4-BE49-F238E27FC236}">
-                <a16:creationId xmlns:a16="http://schemas.microsoft.com/office/drawing/2014/main" id="{01757423-35CF-D2F3-4211-DB8748C3A1EA}"/>
+                <a16:creationId xmlns:a16="http://schemas.microsoft.com/office/drawing/2014/main" id="{3C9FE5A9-F821-B547-0EBC-D55EBE0C4C23}"/>
               </a:ext>
             </a:extLst>
           </p:cNvPr>
@@ -2456,7 +3411,7 @@
           <p:cNvPr id="14" name="角丸四角形 13">
             <a:extLst>
               <a:ext uri="{FF2B5EF4-FFF2-40B4-BE49-F238E27FC236}">
-                <a16:creationId xmlns:a16="http://schemas.microsoft.com/office/drawing/2014/main" id="{080AE603-F839-BAFF-7FDE-E6F1C9E7AF92}"/>
+                <a16:creationId xmlns:a16="http://schemas.microsoft.com/office/drawing/2014/main" id="{457AF576-AC2D-9E43-0F3E-8728E8F7B9F6}"/>
               </a:ext>
             </a:extLst>
           </p:cNvPr>
@@ -2525,7 +3480,7 @@
           <p:cNvPr id="16" name="テキスト ボックス 15">
             <a:extLst>
               <a:ext uri="{FF2B5EF4-FFF2-40B4-BE49-F238E27FC236}">
-                <a16:creationId xmlns:a16="http://schemas.microsoft.com/office/drawing/2014/main" id="{DED029FE-4D59-9D9E-D5DE-A57E24D4F932}"/>
+                <a16:creationId xmlns:a16="http://schemas.microsoft.com/office/drawing/2014/main" id="{ADF66540-D07B-D276-83FF-7B5B6DF84342}"/>
               </a:ext>
             </a:extLst>
           </p:cNvPr>
@@ -2584,7 +3539,7 @@
           <p:cNvPr id="19" name="曲折矢印 18">
             <a:extLst>
               <a:ext uri="{FF2B5EF4-FFF2-40B4-BE49-F238E27FC236}">
-                <a16:creationId xmlns:a16="http://schemas.microsoft.com/office/drawing/2014/main" id="{540AD0D5-093B-7769-97D8-890A9F6787A9}"/>
+                <a16:creationId xmlns:a16="http://schemas.microsoft.com/office/drawing/2014/main" id="{1B5F6CE9-5DB9-E1FC-DC61-3FBF700AC0CE}"/>
               </a:ext>
             </a:extLst>
           </p:cNvPr>
@@ -2646,7 +3601,7 @@
           <p:cNvPr id="20" name="曲折矢印 19">
             <a:extLst>
               <a:ext uri="{FF2B5EF4-FFF2-40B4-BE49-F238E27FC236}">
-                <a16:creationId xmlns:a16="http://schemas.microsoft.com/office/drawing/2014/main" id="{90FD38D2-6FEE-A798-886C-A0474E453049}"/>
+                <a16:creationId xmlns:a16="http://schemas.microsoft.com/office/drawing/2014/main" id="{399F8147-16DB-E038-7900-B84682801504}"/>
               </a:ext>
             </a:extLst>
           </p:cNvPr>
@@ -2706,7 +3661,7 @@
     </p:spTree>
     <p:extLst>
       <p:ext uri="{BB962C8B-B14F-4D97-AF65-F5344CB8AC3E}">
-        <p14:creationId xmlns:p14="http://schemas.microsoft.com/office/powerpoint/2010/main" val="2269604328"/>
+        <p14:creationId xmlns:p14="http://schemas.microsoft.com/office/powerpoint/2010/main" val="1980796661"/>
       </p:ext>
     </p:extLst>
   </p:cSld>
